--- a/选题及要求.pptx
+++ b/选题及要求.pptx
@@ -204,7 +204,7 @@
           <a:p>
             <a:fld id="{AA24CD06-CDB8-463C-82C0-327730F8ACA7}" type="datetimeFigureOut">
               <a:rPr lang="en-US" smtClean="0"/>
-              <a:t>6/23/2026</a:t>
+              <a:t>6/29/2026</a:t>
             </a:fld>
             <a:endParaRPr lang="en-US"/>
           </a:p>
@@ -1275,7 +1275,7 @@
           <a:p>
             <a:fld id="{29F8D91E-FFF0-45B5-AFE0-22E101FDFDBC}" type="datetimeFigureOut">
               <a:rPr lang="en-US" smtClean="0"/>
-              <a:t>6/23/2026</a:t>
+              <a:t>6/29/2026</a:t>
             </a:fld>
             <a:endParaRPr lang="en-US"/>
           </a:p>
@@ -1445,7 +1445,7 @@
           <a:p>
             <a:fld id="{29F8D91E-FFF0-45B5-AFE0-22E101FDFDBC}" type="datetimeFigureOut">
               <a:rPr lang="en-US" smtClean="0"/>
-              <a:t>6/23/2026</a:t>
+              <a:t>6/29/2026</a:t>
             </a:fld>
             <a:endParaRPr lang="en-US"/>
           </a:p>
@@ -1625,7 +1625,7 @@
           <a:p>
             <a:fld id="{29F8D91E-FFF0-45B5-AFE0-22E101FDFDBC}" type="datetimeFigureOut">
               <a:rPr lang="en-US" smtClean="0"/>
-              <a:t>6/23/2026</a:t>
+              <a:t>6/29/2026</a:t>
             </a:fld>
             <a:endParaRPr lang="en-US"/>
           </a:p>
@@ -1795,7 +1795,7 @@
           <a:p>
             <a:fld id="{29F8D91E-FFF0-45B5-AFE0-22E101FDFDBC}" type="datetimeFigureOut">
               <a:rPr lang="en-US" smtClean="0"/>
-              <a:t>6/23/2026</a:t>
+              <a:t>6/29/2026</a:t>
             </a:fld>
             <a:endParaRPr lang="en-US"/>
           </a:p>
@@ -2039,7 +2039,7 @@
           <a:p>
             <a:fld id="{29F8D91E-FFF0-45B5-AFE0-22E101FDFDBC}" type="datetimeFigureOut">
               <a:rPr lang="en-US" smtClean="0"/>
-              <a:t>6/23/2026</a:t>
+              <a:t>6/29/2026</a:t>
             </a:fld>
             <a:endParaRPr lang="en-US"/>
           </a:p>
@@ -2271,7 +2271,7 @@
           <a:p>
             <a:fld id="{29F8D91E-FFF0-45B5-AFE0-22E101FDFDBC}" type="datetimeFigureOut">
               <a:rPr lang="en-US" smtClean="0"/>
-              <a:t>6/23/2026</a:t>
+              <a:t>6/29/2026</a:t>
             </a:fld>
             <a:endParaRPr lang="en-US"/>
           </a:p>
@@ -2638,7 +2638,7 @@
           <a:p>
             <a:fld id="{29F8D91E-FFF0-45B5-AFE0-22E101FDFDBC}" type="datetimeFigureOut">
               <a:rPr lang="en-US" smtClean="0"/>
-              <a:t>6/23/2026</a:t>
+              <a:t>6/29/2026</a:t>
             </a:fld>
             <a:endParaRPr lang="en-US"/>
           </a:p>
@@ -2756,7 +2756,7 @@
           <a:p>
             <a:fld id="{29F8D91E-FFF0-45B5-AFE0-22E101FDFDBC}" type="datetimeFigureOut">
               <a:rPr lang="en-US" smtClean="0"/>
-              <a:t>6/23/2026</a:t>
+              <a:t>6/29/2026</a:t>
             </a:fld>
             <a:endParaRPr lang="en-US"/>
           </a:p>
@@ -2851,7 +2851,7 @@
           <a:p>
             <a:fld id="{29F8D91E-FFF0-45B5-AFE0-22E101FDFDBC}" type="datetimeFigureOut">
               <a:rPr lang="en-US" smtClean="0"/>
-              <a:t>6/23/2026</a:t>
+              <a:t>6/29/2026</a:t>
             </a:fld>
             <a:endParaRPr lang="en-US"/>
           </a:p>
@@ -3128,7 +3128,7 @@
           <a:p>
             <a:fld id="{29F8D91E-FFF0-45B5-AFE0-22E101FDFDBC}" type="datetimeFigureOut">
               <a:rPr lang="en-US" smtClean="0"/>
-              <a:t>6/23/2026</a:t>
+              <a:t>6/29/2026</a:t>
             </a:fld>
             <a:endParaRPr lang="en-US"/>
           </a:p>
@@ -3385,7 +3385,7 @@
           <a:p>
             <a:fld id="{29F8D91E-FFF0-45B5-AFE0-22E101FDFDBC}" type="datetimeFigureOut">
               <a:rPr lang="en-US" smtClean="0"/>
-              <a:t>6/23/2026</a:t>
+              <a:t>6/29/2026</a:t>
             </a:fld>
             <a:endParaRPr lang="en-US"/>
           </a:p>
@@ -3598,7 +3598,7 @@
           <a:p>
             <a:fld id="{29F8D91E-FFF0-45B5-AFE0-22E101FDFDBC}" type="datetimeFigureOut">
               <a:rPr lang="en-US" smtClean="0"/>
-              <a:t>6/23/2026</a:t>
+              <a:t>6/29/2026</a:t>
             </a:fld>
             <a:endParaRPr lang="en-US"/>
           </a:p>
@@ -4572,8 +4572,8 @@
           </a:p>
         </p:txBody>
       </p:sp>
-      <mc:AlternateContent xmlns:mc="http://schemas.openxmlformats.org/markup-compatibility/2006">
-        <mc:Choice xmlns:a14="http://schemas.microsoft.com/office/drawing/2010/main" Requires="a14">
+      <mc:AlternateContent xmlns:mc="http://schemas.openxmlformats.org/markup-compatibility/2006" xmlns:a14="http://schemas.microsoft.com/office/drawing/2010/main">
+        <mc:Choice Requires="a14">
           <p:sp>
             <p:nvSpPr>
               <p:cNvPr id="4" name="文本框 3">
@@ -4602,6 +4602,7 @@
               </a:bodyPr>
               <a:lstStyle/>
               <a:p>
+                <a:pPr/>
                 <a14:m>
                   <m:oMathPara xmlns:m="http://schemas.openxmlformats.org/officeDocument/2006/math">
                     <m:oMathParaPr>
@@ -4720,7 +4721,7 @@
             </p:txBody>
           </p:sp>
         </mc:Choice>
-        <mc:Fallback>
+        <mc:Fallback xmlns="">
           <p:sp>
             <p:nvSpPr>
               <p:cNvPr id="4" name="文本框 3">
@@ -4795,8 +4796,8 @@
           </a:prstGeom>
         </p:spPr>
       </p:pic>
-      <mc:AlternateContent xmlns:mc="http://schemas.openxmlformats.org/markup-compatibility/2006">
-        <mc:Choice xmlns:a14="http://schemas.microsoft.com/office/drawing/2010/main" Requires="a14">
+      <mc:AlternateContent xmlns:mc="http://schemas.openxmlformats.org/markup-compatibility/2006" xmlns:a14="http://schemas.microsoft.com/office/drawing/2010/main">
+        <mc:Choice Requires="a14">
           <p:sp>
             <p:nvSpPr>
               <p:cNvPr id="14" name="文本框 13">
@@ -4899,7 +4900,7 @@
             </p:txBody>
           </p:sp>
         </mc:Choice>
-        <mc:Fallback>
+        <mc:Fallback xmlns="">
           <p:sp>
             <p:nvSpPr>
               <p:cNvPr id="14" name="文本框 13">
@@ -5935,8 +5936,8 @@
           </a:p>
         </p:txBody>
       </p:sp>
-      <mc:AlternateContent xmlns:mc="http://schemas.openxmlformats.org/markup-compatibility/2006">
-        <mc:Choice xmlns:a14="http://schemas.microsoft.com/office/drawing/2010/main" Requires="a14">
+      <mc:AlternateContent xmlns:mc="http://schemas.openxmlformats.org/markup-compatibility/2006" xmlns:a14="http://schemas.microsoft.com/office/drawing/2010/main">
+        <mc:Choice Requires="a14">
           <p:sp>
             <p:nvSpPr>
               <p:cNvPr id="6" name="文本框 5">
@@ -6127,7 +6128,7 @@
             </p:txBody>
           </p:sp>
         </mc:Choice>
-        <mc:Fallback>
+        <mc:Fallback xmlns="">
           <p:sp>
             <p:nvSpPr>
               <p:cNvPr id="6" name="文本框 5">
@@ -6549,6 +6550,69 @@
                 <a:cs typeface="Times New Roman" panose="02020603050405020304" pitchFamily="18" charset="0"/>
               </a:rPr>
               <a:t> or FNO</a:t>
+            </a:r>
+          </a:p>
+        </p:txBody>
+      </p:sp>
+      <p:sp>
+        <p:nvSpPr>
+          <p:cNvPr id="5" name="TextBox 4">
+            <a:extLst>
+              <a:ext uri="{FF2B5EF4-FFF2-40B4-BE49-F238E27FC236}">
+                <a16:creationId xmlns:a16="http://schemas.microsoft.com/office/drawing/2014/main" id="{819C44D2-D101-1A59-8B64-29AB6B66DC14}"/>
+              </a:ext>
+            </a:extLst>
+          </p:cNvPr>
+          <p:cNvSpPr txBox="1"/>
+          <p:nvPr/>
+        </p:nvSpPr>
+        <p:spPr>
+          <a:xfrm>
+            <a:off x="1993432" y="5991899"/>
+            <a:ext cx="7778415" cy="707886"/>
+          </a:xfrm>
+          <a:prstGeom prst="rect">
+            <a:avLst/>
+          </a:prstGeom>
+          <a:noFill/>
+        </p:spPr>
+        <p:txBody>
+          <a:bodyPr wrap="square">
+            <a:spAutoFit/>
+          </a:bodyPr>
+          <a:lstStyle/>
+          <a:p>
+            <a:pPr algn="ctr"/>
+            <a:r>
+              <a:rPr lang="en-US" sz="2000" dirty="0">
+                <a:latin typeface="Times New Roman" panose="02020603050405020304" pitchFamily="18" charset="0"/>
+                <a:cs typeface="Times New Roman" panose="02020603050405020304" pitchFamily="18" charset="0"/>
+              </a:rPr>
+              <a:t>﻿Pacific Earthquake Engineering Research Center database</a:t>
+            </a:r>
+          </a:p>
+          <a:p>
+            <a:pPr algn="ctr"/>
+            <a:r>
+              <a:rPr lang="en-US" sz="2000" dirty="0">
+                <a:latin typeface="Times New Roman" panose="02020603050405020304" pitchFamily="18" charset="0"/>
+                <a:cs typeface="Times New Roman" panose="02020603050405020304" pitchFamily="18" charset="0"/>
+              </a:rPr>
+              <a:t>https://</a:t>
+            </a:r>
+            <a:r>
+              <a:rPr lang="en-US" sz="2000" dirty="0" err="1">
+                <a:latin typeface="Times New Roman" panose="02020603050405020304" pitchFamily="18" charset="0"/>
+                <a:cs typeface="Times New Roman" panose="02020603050405020304" pitchFamily="18" charset="0"/>
+              </a:rPr>
+              <a:t>peer.berkeley.edu</a:t>
+            </a:r>
+            <a:r>
+              <a:rPr lang="en-US" sz="2000" dirty="0">
+                <a:latin typeface="Times New Roman" panose="02020603050405020304" pitchFamily="18" charset="0"/>
+                <a:cs typeface="Times New Roman" panose="02020603050405020304" pitchFamily="18" charset="0"/>
+              </a:rPr>
+              <a:t>/</a:t>
             </a:r>
           </a:p>
         </p:txBody>
